--- a/research/to_human/EgoPed_onepager.pptx
+++ b/research/to_human/EgoPed_onepager.pptx
@@ -5246,7 +5246,7 @@
                           </a:solidFill>
                           <a:latin typeface="Calibri"/>
                         </a:rPr>
-                        <a:t>3.39/4.72/4.80</a:t>
+                        <a:t>H4 3.39/4.72/4.80</a:t>
                       </a:r>
                     </a:p>
                   </a:txBody>
@@ -5269,7 +5269,7 @@
                           </a:solidFill>
                           <a:latin typeface="Calibri"/>
                         </a:rPr>
-                        <a:t>real variance</a:t>
+                        <a:t>H4 varies, IA replicates</a:t>
                       </a:r>
                     </a:p>
                   </a:txBody>
@@ -6319,7 +6319,7 @@
                 </a:solidFill>
                 <a:latin typeface="Calibri"/>
               </a:rPr>
-              <a:t>information ladder (FID / ADE / behaviour-separation) — 0 bits: 3.24 / 2.99 / 0.04 → 5-bit vehicle text: 5.91 / 2.52 / 0.21 → oracle text (told the behaviour): 2.82 / 1.90 / 0.93 → trajectory (H4): 3.39 / 2.32 / 0.33. The trajectory recovers 61% of the know-nothing→know-the-outcome ADE gap, vehicle text 43%. FID ranks marginals, not conditioning — an ego-BLIND model trained on IA's interaction-sampling recipe scores the best FID in the study (1.43) at chance-level conditioning (ADE 3.00, separation 0.02), so IA's FID lead is data curation, not conditioning; H4 is the best-conditioned model. </a:t>
+              <a:t>information ladder (FID / ADE / behaviour-separation) — 0 bits: 3.24 / 2.99 / 0.04 → 5-bit vehicle text: 5.91 / 2.52 / 0.21 → oracle text (told the behaviour): 2.82 / 1.90 / 0.93 → trajectory (H4): 3.39 / 2.32 / 0.33. The trajectory recovers 61% of the know-nothing→know-the-outcome ADE gap, vehicle text 43%. FID ranks marginals, not conditioning — an ego-BLIND model trained on IA's interaction-sampling recipe scores the best FID in the study (1.43) at chance-level conditioning (ADE 3.00, separation 0.02), so IA's FID lead is data curation, not conditioning; H4 is the best-conditioned model. A second IA seed replicates both halves: FID 2.671 vs 2.880, and the same per-condition shortfall (ADE 2.61, separation 0.14). </a:t>
             </a:r>
             <a:r>
               <a:rPr sz="950" b="1" i="0">
@@ -6337,7 +6337,7 @@
                 </a:solidFill>
                 <a:latin typeface="Calibri"/>
               </a:rPr>
-              <a:t>pose-label quality audit · EgoPed-IA is single-seed · no physics constraints · no perceptual study yet.</a:t>
+              <a:t>pose-label quality audit · no physics constraints · no perceptual study yet.</a:t>
             </a:r>
           </a:p>
         </p:txBody>

--- a/research/to_human/EgoPed_onepager.pptx
+++ b/research/to_human/EgoPed_onepager.pptx
@@ -6191,6 +6191,22 @@
               <a:t>▪  Behavioral probe — best coupling of stop/walk decisions to the ego; unconditional model is ego-blind (sanity ✓).</a:t>
             </a:r>
           </a:p>
+          <a:p>
+            <a:pPr>
+              <a:spcAft>
+                <a:spcPts val="350"/>
+              </a:spcAft>
+            </a:pPr>
+            <a:r>
+              <a:rPr sz="950" b="0" i="0">
+                <a:solidFill>
+                  <a:srgbClr val="1F2A37"/>
+                </a:solidFill>
+                <a:latin typeface="Calibri"/>
+              </a:rPr>
+              <a:t>▪  Pose-label audit (all 14,172 seqs, reference-free) — feet never plant (skate 0.97), one canonical skeleton, articulation 0.44× mocap. ADE/probe use the ROOT (sound); FID scores the damped body (exposed).</a:t>
+            </a:r>
+          </a:p>
         </p:txBody>
       </p:sp>
       <p:sp>
@@ -6337,7 +6353,7 @@
                 </a:solidFill>
                 <a:latin typeface="Calibri"/>
               </a:rPr>
-              <a:t>pose-label quality audit · no physics constraints · no perceptual study yet.</a:t>
+              <a:t>pseudo-GT is a canonical body that SLIDES (skate ratio 0.97; one skeleton for all 14,172) — root trajectories are sound, body pose is not · no physics constraints · no perceptual study yet.</a:t>
             </a:r>
           </a:p>
         </p:txBody>
